--- a/tests/fixtures/torture.pptx
+++ b/tests/fixtures/torture.pptx
@@ -4,6 +4,9 @@
   <p:sldMasterIdLst>
     <p:sldMasterId id="2147483648" r:id="rId1"/>
   </p:sldMasterIdLst>
+  <p:notesMasterIdLst>
+    <p:notesMasterId r:id="rId3"/>
+  </p:notesMasterIdLst>
   <p:sldIdLst>
     <p:sldId id="256" r:id="rId2"/>
   </p:sldIdLst>
@@ -37,22 +40,140 @@
       <c:barChart>
         <c:barDir val="col"/>
         <c:grouping val="clustered"/>
+        <c:varyColors val="0"/>
         <c:ser>
           <c:idx val="0"/>
           <c:order val="0"/>
           <c:tx>
             <c:strRef>
               <c:f>ورقة1!$A$1</c:f>
+              <c:strCache>
+                <c:ptCount val="1"/>
+                <c:pt idx="0">
+                  <c:v>الإيرادات</c:v>
+                </c:pt>
+              </c:strCache>
             </c:strRef>
           </c:tx>
+          <c:cat>
+            <c:strRef>
+              <c:f>ورقة1!$A$2:$A$5</c:f>
+              <c:strCache>
+                <c:ptCount val="4"/>
+                <c:pt idx="0">
+                  <c:v>الربع الأول</c:v>
+                </c:pt>
+                <c:pt idx="1">
+                  <c:v>الربع الثاني</c:v>
+                </c:pt>
+                <c:pt idx="2">
+                  <c:v>الربع الثالث</c:v>
+                </c:pt>
+                <c:pt idx="3">
+                  <c:v>الربع الرابع</c:v>
+                </c:pt>
+              </c:strCache>
+            </c:strRef>
+          </c:cat>
+          <c:val>
+            <c:numRef>
+              <c:f>ورقة1!$B$2:$B$5</c:f>
+              <c:numCache>
+                <c:formatCode>General</c:formatCode>
+                <c:ptCount val="4"/>
+                <c:pt idx="0">
+                  <c:v>18</c:v>
+                </c:pt>
+                <c:pt idx="1">
+                  <c:v>21</c:v>
+                </c:pt>
+                <c:pt idx="2">
+                  <c:v>23</c:v>
+                </c:pt>
+                <c:pt idx="3">
+                  <c:v>25</c:v>
+                </c:pt>
+              </c:numCache>
+            </c:numRef>
+          </c:val>
         </c:ser>
+        <c:gapWidth val="150"/>
+        <c:axId val="111111111"/>
+        <c:axId val="222222222"/>
       </c:barChart>
+      <c:catAx>
+        <c:axId val="111111111"/>
+        <c:scaling>
+          <c:orientation val="minMax"/>
+        </c:scaling>
+        <c:delete val="0"/>
+        <c:axPos val="b"/>
+        <c:crossAx val="222222222"/>
+      </c:catAx>
+      <c:valAx>
+        <c:axId val="222222222"/>
+        <c:scaling>
+          <c:orientation val="minMax"/>
+        </c:scaling>
+        <c:delete val="0"/>
+        <c:axPos val="l"/>
+        <c:crossAx val="111111111"/>
+      </c:valAx>
     </c:plotArea>
+    <c:plotVisOnly val="1"/>
   </c:chart>
   <c:externalData r:id="rId1">
     <c:autoUpdate val="0"/>
   </c:externalData>
 </c:chartSpace>
+</file>
+
+<file path=ppt/notesMasters/notesMaster1.xml><?xml version="1.0" encoding="utf-8"?>
+<p:notesMaster xmlns:a="http://schemas.openxmlformats.org/drawingml/2006/main" xmlns:r="http://schemas.openxmlformats.org/officeDocument/2006/relationships" xmlns:p="http://schemas.openxmlformats.org/presentationml/2006/main">
+  <p:cSld>
+    <p:spTree>
+      <p:nvGrpSpPr>
+        <p:cNvPr id="1" name="Shape Tree"/>
+        <p:cNvGrpSpPr/>
+        <p:nvPr/>
+      </p:nvGrpSpPr>
+      <p:grpSpPr/>
+      <p:sp>
+        <p:nvSpPr>
+          <p:cNvPr id="2" name="Notes Placeholder"/>
+          <p:cNvSpPr/>
+          <p:nvPr>
+            <p:ph type="body" idx="1"/>
+          </p:nvPr>
+        </p:nvSpPr>
+        <p:spPr>
+          <a:xfrm>
+            <a:off x="685800" y="4571999"/>
+            <a:ext cx="5486400" cy="3886200"/>
+          </a:xfrm>
+          <a:prstGeom prst="rect">
+            <a:avLst/>
+          </a:prstGeom>
+        </p:spPr>
+        <p:txBody>
+          <a:bodyPr/>
+          <a:lstStyle/>
+          <a:p>
+            <a:endParaRPr/>
+          </a:p>
+        </p:txBody>
+      </p:sp>
+    </p:spTree>
+  </p:cSld>
+  <p:clrMap bg1="lt1" tx1="dk1" bg2="lt2" tx2="dk2" accent1="accent1" accent2="accent2" accent3="accent3" accent4="accent4" accent5="accent5" accent6="accent6" hlink="hlink" folHlink="folHlink"/>
+  <p:notesStyle>
+    <a:lvl1pPr rtl="1" algn="r">
+      <a:defRPr lang="ar-SA">
+        <a:cs typeface="Dubai"/>
+      </a:defRPr>
+    </a:lvl1pPr>
+  </p:notesStyle>
+</p:notesMaster>
 </file>
 
 <file path=ppt/notesSlides/notesSlide1.xml><?xml version="1.0" encoding="utf-8"?>
@@ -64,6 +185,7 @@
         <p:cNvGrpSpPr/>
         <p:nvPr/>
       </p:nvGrpSpPr>
+      <p:grpSpPr/>
       <p:sp>
         <p:nvSpPr>
           <p:cNvPr id="2" name="Notes Placeholder 1"/>
@@ -99,6 +221,7 @@
         <p:cNvGrpSpPr/>
         <p:nvPr/>
       </p:nvGrpSpPr>
+      <p:grpSpPr/>
       <p:sp>
         <p:nvSpPr>
           <p:cNvPr id="2" name="Title Placeholder"/>
@@ -107,7 +230,42 @@
             <p:ph type="title"/>
           </p:nvPr>
         </p:nvSpPr>
-        <p:spPr/>
+        <p:spPr>
+          <a:xfrm>
+            <a:off x="838200" y="365125"/>
+            <a:ext cx="10515600" cy="1325563"/>
+          </a:xfrm>
+          <a:prstGeom prst="rect">
+            <a:avLst/>
+          </a:prstGeom>
+        </p:spPr>
+        <p:txBody>
+          <a:bodyPr/>
+          <a:lstStyle>
+            <a:lvl1pPr rtl="1" algn="r"/>
+          </a:lstStyle>
+          <a:p>
+            <a:endParaRPr/>
+          </a:p>
+        </p:txBody>
+      </p:sp>
+      <p:sp>
+        <p:nvSpPr>
+          <p:cNvPr id="3" name="Body Placeholder"/>
+          <p:cNvSpPr/>
+          <p:nvPr>
+            <p:ph type="body" idx="1"/>
+          </p:nvPr>
+        </p:nvSpPr>
+        <p:spPr>
+          <a:xfrm>
+            <a:off x="838200" y="1825625"/>
+            <a:ext cx="10515600" cy="1325563"/>
+          </a:xfrm>
+          <a:prstGeom prst="rect">
+            <a:avLst/>
+          </a:prstGeom>
+        </p:spPr>
         <p:txBody>
           <a:bodyPr/>
           <a:lstStyle>
@@ -135,6 +293,57 @@
         <p:cNvGrpSpPr/>
         <p:nvPr/>
       </p:nvGrpSpPr>
+      <p:grpSpPr/>
+      <p:sp>
+        <p:nvSpPr>
+          <p:cNvPr id="2" name="Title Placeholder"/>
+          <p:cNvSpPr/>
+          <p:nvPr>
+            <p:ph type="title"/>
+          </p:nvPr>
+        </p:nvSpPr>
+        <p:spPr>
+          <a:xfrm>
+            <a:off x="838200" y="365125"/>
+            <a:ext cx="10515600" cy="1325563"/>
+          </a:xfrm>
+          <a:prstGeom prst="rect">
+            <a:avLst/>
+          </a:prstGeom>
+        </p:spPr>
+        <p:txBody>
+          <a:bodyPr/>
+          <a:lstStyle/>
+          <a:p>
+            <a:endParaRPr/>
+          </a:p>
+        </p:txBody>
+      </p:sp>
+      <p:sp>
+        <p:nvSpPr>
+          <p:cNvPr id="3" name="Body Placeholder"/>
+          <p:cNvSpPr/>
+          <p:nvPr>
+            <p:ph type="body" idx="1"/>
+          </p:nvPr>
+        </p:nvSpPr>
+        <p:spPr>
+          <a:xfrm>
+            <a:off x="838200" y="1825625"/>
+            <a:ext cx="10515600" cy="1325563"/>
+          </a:xfrm>
+          <a:prstGeom prst="rect">
+            <a:avLst/>
+          </a:prstGeom>
+        </p:spPr>
+        <p:txBody>
+          <a:bodyPr/>
+          <a:lstStyle/>
+          <a:p>
+            <a:endParaRPr/>
+          </a:p>
+        </p:txBody>
+      </p:sp>
     </p:spTree>
   </p:cSld>
   <p:clrMap bg1="lt1" tx1="dk1" bg2="lt2" tx2="dk2" accent1="accent1" accent2="accent2" accent3="accent3" accent4="accent4" accent5="accent5" accent6="accent6" hlink="hlink" folHlink="folHlink"/>
@@ -149,11 +358,27 @@
         </a:defRPr>
       </a:lvl1pPr>
     </p:titleStyle>
+    <p:bodyStyle>
+      <a:lvl1pPr rtl="1" algn="r">
+        <a:buNone/>
+        <a:defRPr lang="ar-SA">
+          <a:cs typeface="Dubai"/>
+        </a:defRPr>
+      </a:lvl1pPr>
+    </p:bodyStyle>
+    <p:otherStyle>
+      <a:lvl1pPr rtl="1" algn="r">
+        <a:defRPr lang="ar-SA">
+          <a:cs typeface="Dubai"/>
+        </a:defRPr>
+      </a:lvl1pPr>
+    </p:otherStyle>
   </p:txStyles>
 </p:sldMaster>
 </file>
 
 <file path=ppt/slides/slide1.xml><?xml version="1.0" encoding="utf-8"?>
+<?mso-application progid="PowerPoint.Show"?>
 <p:sld xmlns:a="http://schemas.openxmlformats.org/drawingml/2006/main" xmlns:r="http://schemas.openxmlformats.org/officeDocument/2006/relationships" xmlns:p="http://schemas.openxmlformats.org/presentationml/2006/main" xmlns:mc="http://schemas.openxmlformats.org/markup-compatibility/2006" xmlns:p14="http://schemas.microsoft.com/office/powerpoint/2010/main" mc:Ignorable="p14">
   <!-- mc:Ignorable above names the p14 prefix as a STRING. Rename the prefix on serialisation and this document silently becomes invalid. -->
   <p:cSld>
@@ -163,6 +388,7 @@
         <p:cNvGrpSpPr/>
         <p:nvPr/>
       </p:nvGrpSpPr>
+      <p:grpSpPr/>
       <p:sp>
         <p:nvSpPr>
           <p:cNvPr id="2" name="Title 1"/>
@@ -193,8 +419,8 @@
               <p:nvPr/>
             </p:nvGraphicFramePr>
             <p:xfrm>
-              <a:off x="838200" y="1825625"/>
-              <a:ext cx="10515600" cy="4351338"/>
+              <a:off x="838200" y="3300000"/>
+              <a:ext cx="10515600" cy="3000000"/>
             </p:xfrm>
             <a:graphic>
               <a:graphicData uri="http://schemas.openxmlformats.org/drawingml/2006/chart">
@@ -210,7 +436,15 @@
               <p:cNvSpPr/>
               <p:nvPr/>
             </p:nvSpPr>
-            <p:spPr/>
+            <p:spPr>
+              <a:xfrm>
+                <a:off x="838200" y="3300000"/>
+                <a:ext cx="10515600" cy="3000000"/>
+              </a:xfrm>
+              <a:prstGeom prst="rect">
+                <a:avLst/>
+              </a:prstGeom>
+            </p:spPr>
             <p:txBody>
               <a:bodyPr/>
               <a:lstStyle/>
@@ -245,7 +479,6 @@
       </p:sp>
     </p:spTree>
   </p:cSld>
-  <?mso-application progid="PowerPoint.Slide"?>
   <p:clrMapOvr>
     <a:masterClrMapping/>
   </p:clrMapOvr>
@@ -255,16 +488,217 @@
 <file path=ppt/theme/theme1.xml><?xml version="1.0" encoding="utf-8"?>
 <a:theme xmlns:a="http://schemas.openxmlformats.org/drawingml/2006/main" name="Office">
   <a:themeElements>
+    <a:clrScheme name="Office">
+      <a:dk1>
+        <a:sysClr val="windowText" lastClr="000000"/>
+      </a:dk1>
+      <a:lt1>
+        <a:sysClr val="window" lastClr="FFFFFF"/>
+      </a:lt1>
+      <a:dk2>
+        <a:srgbClr val="44546A"/>
+      </a:dk2>
+      <a:lt2>
+        <a:srgbClr val="E7E6E6"/>
+      </a:lt2>
+      <a:accent1>
+        <a:srgbClr val="4472C4"/>
+      </a:accent1>
+      <a:accent2>
+        <a:srgbClr val="ED7D31"/>
+      </a:accent2>
+      <a:accent3>
+        <a:srgbClr val="A5A5A5"/>
+      </a:accent3>
+      <a:accent4>
+        <a:srgbClr val="FFC000"/>
+      </a:accent4>
+      <a:accent5>
+        <a:srgbClr val="5B9BD5"/>
+      </a:accent5>
+      <a:accent6>
+        <a:srgbClr val="70AD47"/>
+      </a:accent6>
+      <a:hlink>
+        <a:srgbClr val="0563C1"/>
+      </a:hlink>
+      <a:folHlink>
+        <a:srgbClr val="954F72"/>
+      </a:folHlink>
+    </a:clrScheme>
     <a:fontScheme name="Office">
       <a:majorFont>
         <a:latin typeface="Calibri Light"/>
+        <a:ea typeface=""/>
         <a:cs typeface="Dubai"/>
       </a:majorFont>
       <a:minorFont>
         <a:latin typeface="Calibri"/>
+        <a:ea typeface=""/>
         <a:cs typeface="Dubai"/>
       </a:minorFont>
     </a:fontScheme>
+    <a:fmtScheme name="Office">
+      <a:fillStyleLst>
+        <a:solidFill>
+          <a:schemeClr val="phClr"/>
+        </a:solidFill>
+        <a:solidFill>
+          <a:schemeClr val="phClr"/>
+        </a:solidFill>
+        <a:solidFill>
+          <a:schemeClr val="phClr"/>
+        </a:solidFill>
+      </a:fillStyleLst>
+      <a:lnStyleLst>
+        <a:ln w="6350">
+          <a:solidFill>
+            <a:schemeClr val="phClr"/>
+          </a:solidFill>
+        </a:ln>
+        <a:ln w="6350">
+          <a:solidFill>
+            <a:schemeClr val="phClr"/>
+          </a:solidFill>
+        </a:ln>
+        <a:ln w="6350">
+          <a:solidFill>
+            <a:schemeClr val="phClr"/>
+          </a:solidFill>
+        </a:ln>
+      </a:lnStyleLst>
+      <a:effectStyleLst>
+        <a:effectStyle>
+          <a:effectLst/>
+        </a:effectStyle>
+        <a:effectStyle>
+          <a:effectLst/>
+        </a:effectStyle>
+        <a:effectStyle>
+          <a:effectLst/>
+        </a:effectStyle>
+      </a:effectStyleLst>
+      <a:bgFillStyleLst>
+        <a:solidFill>
+          <a:schemeClr val="phClr"/>
+        </a:solidFill>
+        <a:solidFill>
+          <a:schemeClr val="phClr"/>
+        </a:solidFill>
+        <a:solidFill>
+          <a:schemeClr val="phClr"/>
+        </a:solidFill>
+      </a:bgFillStyleLst>
+    </a:fmtScheme>
+  </a:themeElements>
+</a:theme>
+</file>
+
+<file path=ppt/theme/theme2.xml><?xml version="1.0" encoding="utf-8"?>
+<a:theme xmlns:a="http://schemas.openxmlformats.org/drawingml/2006/main" name="Office Notes">
+  <a:themeElements>
+    <a:clrScheme name="Office">
+      <a:dk1>
+        <a:sysClr val="windowText" lastClr="000000"/>
+      </a:dk1>
+      <a:lt1>
+        <a:sysClr val="window" lastClr="FFFFFF"/>
+      </a:lt1>
+      <a:dk2>
+        <a:srgbClr val="44546A"/>
+      </a:dk2>
+      <a:lt2>
+        <a:srgbClr val="E7E6E6"/>
+      </a:lt2>
+      <a:accent1>
+        <a:srgbClr val="4472C4"/>
+      </a:accent1>
+      <a:accent2>
+        <a:srgbClr val="ED7D31"/>
+      </a:accent2>
+      <a:accent3>
+        <a:srgbClr val="A5A5A5"/>
+      </a:accent3>
+      <a:accent4>
+        <a:srgbClr val="FFC000"/>
+      </a:accent4>
+      <a:accent5>
+        <a:srgbClr val="5B9BD5"/>
+      </a:accent5>
+      <a:accent6>
+        <a:srgbClr val="70AD47"/>
+      </a:accent6>
+      <a:hlink>
+        <a:srgbClr val="0563C1"/>
+      </a:hlink>
+      <a:folHlink>
+        <a:srgbClr val="954F72"/>
+      </a:folHlink>
+    </a:clrScheme>
+    <a:fontScheme name="Office">
+      <a:majorFont>
+        <a:latin typeface="Calibri Light"/>
+        <a:ea typeface=""/>
+        <a:cs typeface="Dubai"/>
+      </a:majorFont>
+      <a:minorFont>
+        <a:latin typeface="Calibri"/>
+        <a:ea typeface=""/>
+        <a:cs typeface="Dubai"/>
+      </a:minorFont>
+    </a:fontScheme>
+    <a:fmtScheme name="Office">
+      <a:fillStyleLst>
+        <a:solidFill>
+          <a:schemeClr val="phClr"/>
+        </a:solidFill>
+        <a:solidFill>
+          <a:schemeClr val="phClr"/>
+        </a:solidFill>
+        <a:solidFill>
+          <a:schemeClr val="phClr"/>
+        </a:solidFill>
+      </a:fillStyleLst>
+      <a:lnStyleLst>
+        <a:ln w="6350">
+          <a:solidFill>
+            <a:schemeClr val="phClr"/>
+          </a:solidFill>
+        </a:ln>
+        <a:ln w="6350">
+          <a:solidFill>
+            <a:schemeClr val="phClr"/>
+          </a:solidFill>
+        </a:ln>
+        <a:ln w="6350">
+          <a:solidFill>
+            <a:schemeClr val="phClr"/>
+          </a:solidFill>
+        </a:ln>
+      </a:lnStyleLst>
+      <a:effectStyleLst>
+        <a:effectStyle>
+          <a:effectLst/>
+        </a:effectStyle>
+        <a:effectStyle>
+          <a:effectLst/>
+        </a:effectStyle>
+        <a:effectStyle>
+          <a:effectLst/>
+        </a:effectStyle>
+      </a:effectStyleLst>
+      <a:bgFillStyleLst>
+        <a:solidFill>
+          <a:schemeClr val="phClr"/>
+        </a:solidFill>
+        <a:solidFill>
+          <a:schemeClr val="phClr"/>
+        </a:solidFill>
+        <a:solidFill>
+          <a:schemeClr val="phClr"/>
+        </a:solidFill>
+      </a:bgFillStyleLst>
+    </a:fmtScheme>
   </a:themeElements>
 </a:theme>
 </file>
--- a/tests/fixtures/torture.pptx
+++ b/tests/fixtures/torture.pptx
@@ -354,7 +354,7 @@
     <p:titleStyle>
       <a:lvl1pPr rtl="1" algn="r">
         <a:defRPr lang="ar-SA">
-          <a:cs typeface="Dubai"/>
+          <a:cs typeface="+mj-cs"/>
         </a:defRPr>
       </a:lvl1pPr>
     </p:titleStyle>
@@ -362,7 +362,7 @@
       <a:lvl1pPr rtl="1" algn="r">
         <a:buNone/>
         <a:defRPr lang="ar-SA">
-          <a:cs typeface="Dubai"/>
+          <a:cs typeface="+mn-cs"/>
         </a:defRPr>
       </a:lvl1pPr>
     </p:bodyStyle>
